--- a/納品レポート/ホテル別レポート/ホテルコメント横浜関内_口コミ分析レポート.pptx
+++ b/納品レポート/ホテル別レポート/ホテルコメント横浜関内_口コミ分析レポート.pptx
@@ -180,13 +180,13 @@
                 <c:ptCount val="6"/>
                 <c:lvl>
                   <c:pt idx="0">
+                    <c:v>Google</c:v>
+                  </c:pt>
+                  <c:pt idx="1">
                     <c:v>じゃらん</c:v>
                   </c:pt>
-                  <c:pt idx="1">
+                  <c:pt idx="2">
                     <c:v>楽天トラベル</c:v>
-                  </c:pt>
-                  <c:pt idx="2">
-                    <c:v>Google</c:v>
                   </c:pt>
                   <c:pt idx="3">
                     <c:v>Trip.com</c:v>
@@ -208,22 +208,22 @@
                 <c:formatCode>General</c:formatCode>
                 <c:ptCount val="6"/>
                 <c:pt idx="0">
-                  <c:v>9.5</c:v>
+                  <c:v>9.62</c:v>
                 </c:pt>
                 <c:pt idx="1">
-                  <c:v>9.45</c:v>
+                  <c:v>9.27</c:v>
                 </c:pt>
                 <c:pt idx="2">
-                  <c:v>9.43</c:v>
+                  <c:v>9.22</c:v>
                 </c:pt>
                 <c:pt idx="3">
-                  <c:v>9</c:v>
+                  <c:v>9.12</c:v>
                 </c:pt>
                 <c:pt idx="4">
-                  <c:v>8.76</c:v>
+                  <c:v>8.7</c:v>
                 </c:pt>
                 <c:pt idx="5">
-                  <c:v>7.88</c:v>
+                  <c:v>8</c:v>
                 </c:pt>
               </c:numCache>
             </c:numRef>
@@ -528,10 +528,10 @@
               <c:numCache>
                 <c:ptCount val="2"/>
                 <c:pt idx="0">
-                  <c:v>56</c:v>
+                  <c:v>111</c:v>
                 </c:pt>
                 <c:pt idx="1">
-                  <c:v>8</c:v>
+                  <c:v>20</c:v>
                 </c:pt>
               </c:numCache>
             </c:numRef>
@@ -754,19 +754,19 @@
                 <c:formatCode>General</c:formatCode>
                 <c:ptCount val="7"/>
                 <c:pt idx="0">
-                  <c:v>30</c:v>
+                  <c:v>62</c:v>
                 </c:pt>
                 <c:pt idx="1">
-                  <c:v>12</c:v>
+                  <c:v>22</c:v>
                 </c:pt>
                 <c:pt idx="2">
-                  <c:v>14</c:v>
+                  <c:v>27</c:v>
                 </c:pt>
                 <c:pt idx="3">
-                  <c:v>4</c:v>
+                  <c:v>11</c:v>
                 </c:pt>
                 <c:pt idx="4">
-                  <c:v>2</c:v>
+                  <c:v>7</c:v>
                 </c:pt>
                 <c:pt idx="5">
                   <c:v>2</c:v>
@@ -2703,7 +2703,7 @@
                 <a:ea typeface="Arial" pitchFamily="34" charset="-122"/>
                 <a:cs typeface="Arial" pitchFamily="34" charset="-120"/>
               </a:rPr>
-              <a:t>分析対象期間：2025年12月〜2026年3月</a:t>
+              <a:t>分析対象期間：2025年12月〜2026年4月</a:t>
             </a:r>
             <a:endParaRPr lang="en-US" sz="1000" dirty="0"/>
           </a:p>
@@ -2723,7 +2723,7 @@
                 <a:ea typeface="Arial" pitchFamily="34" charset="-122"/>
                 <a:cs typeface="Arial" pitchFamily="34" charset="-120"/>
               </a:rPr>
-              <a:t>レビュー総数：65件</a:t>
+              <a:t>レビュー総数：132件</a:t>
             </a:r>
             <a:endParaRPr lang="en-US" sz="1000" dirty="0"/>
           </a:p>
@@ -2743,7 +2743,7 @@
                 <a:ea typeface="Arial" pitchFamily="34" charset="-122"/>
                 <a:cs typeface="Arial" pitchFamily="34" charset="-120"/>
               </a:rPr>
-              <a:t>作成日：2026年4月3日</a:t>
+              <a:t>作成日：2026年4月12日</a:t>
             </a:r>
             <a:endParaRPr lang="en-US" sz="1000" dirty="0"/>
           </a:p>
@@ -2922,7 +2922,7 @@
                 <a:ea typeface="Arial" pitchFamily="34" charset="-122"/>
                 <a:cs typeface="Arial" pitchFamily="34" charset="-120"/>
               </a:rPr>
-              <a:t>ホテルコメント横浜関内の2025年12月〜2026年3月口コミ分析（65件）では、総合評価8.82点（10pt換算）、高評価率86.2%という結果が得られました。</a:t>
+              <a:t>ホテルコメント横浜関内の2025年12月〜2026年4月口コミ分析（132件）では、総合評価8.83点（10pt換算）、高評価率84.1%という結果が得られました。</a:t>
             </a:r>
             <a:endParaRPr lang="en-US" sz="1200" dirty="0"/>
           </a:p>
@@ -2980,7 +2980,7 @@
                 <a:ea typeface="Arial" pitchFamily="34" charset="-122"/>
                 <a:cs typeface="Arial" pitchFamily="34" charset="-120"/>
               </a:rPr>
-              <a:t>6ヶ月以内に全体平均9.1点以上、高評価率91%以上を目指し、継続的な改善サイクルを確立することを推奨します。</a:t>
+              <a:t>6ヶ月以内に全体平均9.1点以上、高評価率89%以上を目指し、継続的な改善サイクルを確立することを推奨します。</a:t>
             </a:r>
             <a:endParaRPr lang="en-US" sz="1200" dirty="0"/>
           </a:p>
@@ -3326,7 +3326,7 @@
                 <a:ea typeface="Arial" pitchFamily="34" charset="-122"/>
                 <a:cs typeface="Arial" pitchFamily="34" charset="-120"/>
               </a:rPr>
-              <a:t>8.82</a:t>
+              <a:t>8.83</a:t>
             </a:r>
             <a:endParaRPr lang="en-US" sz="3200" dirty="0"/>
           </a:p>
@@ -3451,7 +3451,7 @@
                 <a:ea typeface="Arial" pitchFamily="34" charset="-122"/>
                 <a:cs typeface="Arial" pitchFamily="34" charset="-120"/>
               </a:rPr>
-              <a:t>86.2%</a:t>
+              <a:t>84.1%</a:t>
             </a:r>
             <a:endParaRPr lang="en-US" sz="3200" dirty="0"/>
           </a:p>
@@ -3576,7 +3576,7 @@
                 <a:ea typeface="Arial" pitchFamily="34" charset="-122"/>
                 <a:cs typeface="Arial" pitchFamily="34" charset="-120"/>
               </a:rPr>
-              <a:t>1.5%</a:t>
+              <a:t>0.8%</a:t>
             </a:r>
             <a:endParaRPr lang="en-US" sz="3200" dirty="0"/>
           </a:p>
@@ -3701,7 +3701,7 @@
                 <a:ea typeface="Arial" pitchFamily="34" charset="-122"/>
                 <a:cs typeface="Arial" pitchFamily="34" charset="-120"/>
               </a:rPr>
-              <a:t>65件</a:t>
+              <a:t>132件</a:t>
             </a:r>
             <a:endParaRPr lang="en-US" sz="3200" dirty="0"/>
           </a:p>
@@ -3849,7 +3849,7 @@
                 <a:ea typeface="Arial" pitchFamily="34" charset="-122"/>
                 <a:cs typeface="Arial" pitchFamily="34" charset="-120"/>
               </a:rPr>
-              <a:t>  客室の快適性・設備の充実度への好評（34件）</a:t>
+              <a:t>  客室の快適性・設備の充実度への好評（71件）</a:t>
             </a:r>
             <a:endParaRPr lang="en-US" sz="1100" dirty="0"/>
           </a:p>
@@ -3889,7 +3889,7 @@
                 <a:ea typeface="Arial" pitchFamily="34" charset="-122"/>
                 <a:cs typeface="Arial" pitchFamily="34" charset="-120"/>
               </a:rPr>
-              <a:t>  客室・共用部の清潔さへの高評価（26件）</a:t>
+              <a:t>  客室・共用部の清潔さへの高評価（51件）</a:t>
             </a:r>
             <a:endParaRPr lang="en-US" sz="1100" dirty="0"/>
           </a:p>
@@ -3929,7 +3929,7 @@
                 <a:ea typeface="Arial" pitchFamily="34" charset="-122"/>
                 <a:cs typeface="Arial" pitchFamily="34" charset="-120"/>
               </a:rPr>
-              <a:t>  駅近・交通利便性に関する好評価（21件）</a:t>
+              <a:t>  駅近・交通利便性に関する好評価（43件）</a:t>
             </a:r>
             <a:endParaRPr lang="en-US" sz="1100" dirty="0"/>
           </a:p>
@@ -4097,7 +4097,7 @@
                 <a:ea typeface="Arial" pitchFamily="34" charset="-122"/>
                 <a:cs typeface="Arial" pitchFamily="34" charset="-120"/>
               </a:rPr>
-              <a:t>朝食品質 </a:t>
+              <a:t>部屋狭小感 </a:t>
             </a:r>
             <a:endParaRPr lang="en-US" sz="1100" dirty="0"/>
           </a:p>
@@ -4137,7 +4137,7 @@
                 <a:ea typeface="Arial" pitchFamily="34" charset="-122"/>
                 <a:cs typeface="Arial" pitchFamily="34" charset="-120"/>
               </a:rPr>
-              <a:t>口コミ返信率 </a:t>
+              <a:t>通信環境 </a:t>
             </a:r>
             <a:endParaRPr lang="en-US" sz="1100" dirty="0"/>
           </a:p>
@@ -4157,7 +4157,7 @@
                 <a:ea typeface="Arial" pitchFamily="34" charset="-122"/>
                 <a:cs typeface="Arial" pitchFamily="34" charset="-120"/>
               </a:rPr>
-              <a:t>  継続的な品質管理・予防的対応を推奨</a:t>
+              <a:t>  2件の指摘あり。改善対応を推奨</a:t>
             </a:r>
             <a:endParaRPr lang="en-US" sz="1100" dirty="0"/>
           </a:p>
@@ -4578,7 +4578,7 @@
                 <a:ea typeface="Arial" pitchFamily="34" charset="-122"/>
                 <a:cs typeface="Arial" pitchFamily="34" charset="-120"/>
               </a:rPr>
-              <a:t>じゃらん: 9.50点</a:t>
+              <a:t>Google: 9.62点</a:t>
             </a:r>
             <a:endParaRPr lang="en-US" sz="1100" dirty="0"/>
           </a:p>
@@ -4627,7 +4627,7 @@
                 <a:ea typeface="Arial" pitchFamily="34" charset="-122"/>
                 <a:cs typeface="Arial" pitchFamily="34" charset="-120"/>
               </a:rPr>
-              <a:t>8.82点（10pt換算）</a:t>
+              <a:t>8.83点（10pt換算）</a:t>
             </a:r>
             <a:endParaRPr lang="en-US" sz="1100" dirty="0"/>
           </a:p>
@@ -5068,7 +5068,7 @@
                           <a:ea typeface="Arial" pitchFamily="34" charset="-122"/>
                           <a:cs typeface="Arial" pitchFamily="34" charset="-120"/>
                         </a:rPr>
-                        <a:t>じゃらん</a:t>
+                        <a:t>Google</a:t>
                       </a:r>
                       <a:endParaRPr lang="en-US" sz="900" dirty="0">
                         <a:latin typeface="Arial" charset="0"/>
@@ -5136,7 +5136,7 @@
                           <a:ea typeface="Arial" pitchFamily="34" charset="-122"/>
                           <a:cs typeface="Arial" pitchFamily="34" charset="-120"/>
                         </a:rPr>
-                        <a:t>4</a:t>
+                        <a:t>16</a:t>
                       </a:r>
                       <a:endParaRPr lang="en-US" sz="900" dirty="0">
                         <a:latin typeface="Arial" charset="0"/>
@@ -5204,7 +5204,7 @@
                           <a:ea typeface="Arial" pitchFamily="34" charset="-122"/>
                           <a:cs typeface="Arial" pitchFamily="34" charset="-120"/>
                         </a:rPr>
-                        <a:t>4.75</a:t>
+                        <a:t>4.81</a:t>
                       </a:r>
                       <a:endParaRPr lang="en-US" sz="900" dirty="0">
                         <a:latin typeface="Arial" charset="0"/>
@@ -5340,7 +5340,7 @@
                           <a:ea typeface="Arial" pitchFamily="34" charset="-122"/>
                           <a:cs typeface="Arial" pitchFamily="34" charset="-120"/>
                         </a:rPr>
-                        <a:t>9.50</a:t>
+                        <a:t>9.62</a:t>
                       </a:r>
                       <a:endParaRPr lang="en-US" sz="900" dirty="0">
                         <a:latin typeface="Arial" charset="0"/>
@@ -5410,7 +5410,7 @@
                           <a:ea typeface="Arial" pitchFamily="34" charset="-122"/>
                           <a:cs typeface="Arial" pitchFamily="34" charset="-120"/>
                         </a:rPr>
-                        <a:t>楽天トラベル</a:t>
+                        <a:t>じゃらん</a:t>
                       </a:r>
                       <a:endParaRPr lang="en-US" sz="900" dirty="0">
                         <a:latin typeface="Arial" charset="0"/>
@@ -5546,7 +5546,7 @@
                           <a:ea typeface="Arial" pitchFamily="34" charset="-122"/>
                           <a:cs typeface="Arial" pitchFamily="34" charset="-120"/>
                         </a:rPr>
-                        <a:t>4.73</a:t>
+                        <a:t>4.64</a:t>
                       </a:r>
                       <a:endParaRPr lang="en-US" sz="900" dirty="0">
                         <a:latin typeface="Arial" charset="0"/>
@@ -5682,7 +5682,7 @@
                           <a:ea typeface="Arial" pitchFamily="34" charset="-122"/>
                           <a:cs typeface="Arial" pitchFamily="34" charset="-120"/>
                         </a:rPr>
-                        <a:t>9.45</a:t>
+                        <a:t>9.27</a:t>
                       </a:r>
                       <a:endParaRPr lang="en-US" sz="900" dirty="0">
                         <a:latin typeface="Arial" charset="0"/>
@@ -5752,7 +5752,7 @@
                           <a:ea typeface="Arial" pitchFamily="34" charset="-122"/>
                           <a:cs typeface="Arial" pitchFamily="34" charset="-120"/>
                         </a:rPr>
-                        <a:t>Google</a:t>
+                        <a:t>楽天トラベル</a:t>
                       </a:r>
                       <a:endParaRPr lang="en-US" sz="900" dirty="0">
                         <a:latin typeface="Arial" charset="0"/>
@@ -5820,7 +5820,7 @@
                           <a:ea typeface="Arial" pitchFamily="34" charset="-122"/>
                           <a:cs typeface="Arial" pitchFamily="34" charset="-120"/>
                         </a:rPr>
-                        <a:t>7</a:t>
+                        <a:t>18</a:t>
                       </a:r>
                       <a:endParaRPr lang="en-US" sz="900" dirty="0">
                         <a:latin typeface="Arial" charset="0"/>
@@ -5888,7 +5888,7 @@
                           <a:ea typeface="Arial" pitchFamily="34" charset="-122"/>
                           <a:cs typeface="Arial" pitchFamily="34" charset="-120"/>
                         </a:rPr>
-                        <a:t>4.71</a:t>
+                        <a:t>4.61</a:t>
                       </a:r>
                       <a:endParaRPr lang="en-US" sz="900" dirty="0">
                         <a:latin typeface="Arial" charset="0"/>
@@ -6024,7 +6024,7 @@
                           <a:ea typeface="Arial" pitchFamily="34" charset="-122"/>
                           <a:cs typeface="Arial" pitchFamily="34" charset="-120"/>
                         </a:rPr>
-                        <a:t>9.43</a:t>
+                        <a:t>9.22</a:t>
                       </a:r>
                       <a:endParaRPr lang="en-US" sz="900" dirty="0">
                         <a:latin typeface="Arial" charset="0"/>
@@ -6162,7 +6162,7 @@
                           <a:ea typeface="Arial" pitchFamily="34" charset="-122"/>
                           <a:cs typeface="Arial" pitchFamily="34" charset="-120"/>
                         </a:rPr>
-                        <a:t>10</a:t>
+                        <a:t>24</a:t>
                       </a:r>
                       <a:endParaRPr lang="en-US" sz="900" dirty="0">
                         <a:latin typeface="Arial" charset="0"/>
@@ -6230,7 +6230,7 @@
                           <a:ea typeface="Arial" pitchFamily="34" charset="-122"/>
                           <a:cs typeface="Arial" pitchFamily="34" charset="-120"/>
                         </a:rPr>
-                        <a:t>9.00</a:t>
+                        <a:t>9.12</a:t>
                       </a:r>
                       <a:endParaRPr lang="en-US" sz="900" dirty="0">
                         <a:latin typeface="Arial" charset="0"/>
@@ -6366,7 +6366,7 @@
                           <a:ea typeface="Arial" pitchFamily="34" charset="-122"/>
                           <a:cs typeface="Arial" pitchFamily="34" charset="-120"/>
                         </a:rPr>
-                        <a:t>9.00</a:t>
+                        <a:t>9.12</a:t>
                       </a:r>
                       <a:endParaRPr lang="en-US" sz="900" dirty="0">
                         <a:latin typeface="Arial" charset="0"/>
@@ -6504,7 +6504,7 @@
                           <a:ea typeface="Arial" pitchFamily="34" charset="-122"/>
                           <a:cs typeface="Arial" pitchFamily="34" charset="-120"/>
                         </a:rPr>
-                        <a:t>17</a:t>
+                        <a:t>30</a:t>
                       </a:r>
                       <a:endParaRPr lang="en-US" sz="900" dirty="0">
                         <a:latin typeface="Arial" charset="0"/>
@@ -6572,7 +6572,7 @@
                           <a:ea typeface="Arial" pitchFamily="34" charset="-122"/>
                           <a:cs typeface="Arial" pitchFamily="34" charset="-120"/>
                         </a:rPr>
-                        <a:t>8.76</a:t>
+                        <a:t>8.70</a:t>
                       </a:r>
                       <a:endParaRPr lang="en-US" sz="900" dirty="0">
                         <a:latin typeface="Arial" charset="0"/>
@@ -6708,7 +6708,7 @@
                           <a:ea typeface="Arial" pitchFamily="34" charset="-122"/>
                           <a:cs typeface="Arial" pitchFamily="34" charset="-120"/>
                         </a:rPr>
-                        <a:t>8.76</a:t>
+                        <a:t>8.70</a:t>
                       </a:r>
                       <a:endParaRPr lang="en-US" sz="900" dirty="0">
                         <a:latin typeface="Arial" charset="0"/>
@@ -6846,7 +6846,7 @@
                           <a:ea typeface="Arial" pitchFamily="34" charset="-122"/>
                           <a:cs typeface="Arial" pitchFamily="34" charset="-120"/>
                         </a:rPr>
-                        <a:t>16</a:t>
+                        <a:t>33</a:t>
                       </a:r>
                       <a:endParaRPr lang="en-US" sz="900" dirty="0">
                         <a:latin typeface="Arial" charset="0"/>
@@ -6914,7 +6914,7 @@
                           <a:ea typeface="Arial" pitchFamily="34" charset="-122"/>
                           <a:cs typeface="Arial" pitchFamily="34" charset="-120"/>
                         </a:rPr>
-                        <a:t>7.88</a:t>
+                        <a:t>8.00</a:t>
                       </a:r>
                       <a:endParaRPr lang="en-US" sz="900" dirty="0">
                         <a:latin typeface="Arial" charset="0"/>
@@ -7050,7 +7050,7 @@
                           <a:ea typeface="Arial" pitchFamily="34" charset="-122"/>
                           <a:cs typeface="Arial" pitchFamily="34" charset="-120"/>
                         </a:rPr>
-                        <a:t>7.88</a:t>
+                        <a:t>8.00</a:t>
                       </a:r>
                       <a:endParaRPr lang="en-US" sz="900" dirty="0">
                         <a:latin typeface="Arial" charset="0"/>
@@ -7458,7 +7458,7 @@
                 <a:ea typeface="Arial" pitchFamily="34" charset="-122"/>
                 <a:cs typeface="Arial" pitchFamily="34" charset="-120"/>
               </a:rPr>
-              <a:t>56件（86.2%）</a:t>
+              <a:t>111件（84.1%）</a:t>
             </a:r>
             <a:endParaRPr lang="en-US" sz="1100" dirty="0"/>
           </a:p>
@@ -7556,7 +7556,7 @@
                 <a:ea typeface="Arial" pitchFamily="34" charset="-122"/>
                 <a:cs typeface="Arial" pitchFamily="34" charset="-120"/>
               </a:rPr>
-              <a:t>8件（12.3%）</a:t>
+              <a:t>20件（15.2%）</a:t>
             </a:r>
             <a:endParaRPr lang="en-US" sz="1100" dirty="0"/>
           </a:p>
@@ -7654,7 +7654,7 @@
                 <a:ea typeface="Arial" pitchFamily="34" charset="-122"/>
                 <a:cs typeface="Arial" pitchFamily="34" charset="-120"/>
               </a:rPr>
-              <a:t>1件（1.5%）</a:t>
+              <a:t>1件（0.8%）</a:t>
             </a:r>
             <a:endParaRPr lang="en-US" sz="1100" dirty="0"/>
           </a:p>
@@ -7988,7 +7988,7 @@
                 <a:ea typeface="Arial" pitchFamily="34" charset="-122"/>
                 <a:cs typeface="Arial" pitchFamily="34" charset="-120"/>
               </a:rPr>
-              <a:t>34件</a:t>
+              <a:t>71件</a:t>
             </a:r>
             <a:endParaRPr lang="en-US" sz="900" dirty="0"/>
           </a:p>
@@ -8211,7 +8211,7 @@
                 <a:ea typeface="Arial" pitchFamily="34" charset="-122"/>
                 <a:cs typeface="Arial" pitchFamily="34" charset="-120"/>
               </a:rPr>
-              <a:t>26件</a:t>
+              <a:t>51件</a:t>
             </a:r>
             <a:endParaRPr lang="en-US" sz="900" dirty="0"/>
           </a:p>
@@ -8434,7 +8434,7 @@
                 <a:ea typeface="Arial" pitchFamily="34" charset="-122"/>
                 <a:cs typeface="Arial" pitchFamily="34" charset="-120"/>
               </a:rPr>
-              <a:t>21件</a:t>
+              <a:t>43件</a:t>
             </a:r>
             <a:endParaRPr lang="en-US" sz="900" dirty="0"/>
           </a:p>
@@ -8657,7 +8657,7 @@
                 <a:ea typeface="Arial" pitchFamily="34" charset="-122"/>
                 <a:cs typeface="Arial" pitchFamily="34" charset="-120"/>
               </a:rPr>
-              <a:t>12件</a:t>
+              <a:t>27件</a:t>
             </a:r>
             <a:endParaRPr lang="en-US" sz="900" dirty="0"/>
           </a:p>
@@ -8880,7 +8880,7 @@
                 <a:ea typeface="Arial" pitchFamily="34" charset="-122"/>
                 <a:cs typeface="Arial" pitchFamily="34" charset="-120"/>
               </a:rPr>
-              <a:t>12件</a:t>
+              <a:t>21件</a:t>
             </a:r>
             <a:endParaRPr lang="en-US" sz="900" dirty="0"/>
           </a:p>
@@ -8895,6 +8895,229 @@
         <p:spPr>
           <a:xfrm>
             <a:off x="3429000" y="2953512"/>
+            <a:ext cx="1645920" cy="274320"/>
+          </a:xfrm>
+          <a:prstGeom prst="rect">
+            <a:avLst/>
+          </a:prstGeom>
+          <a:noFill/>
+          <a:ln/>
+        </p:spPr>
+        <p:txBody>
+          <a:bodyPr wrap="square" lIns="0" tIns="0" rIns="0" bIns="0" rtlCol="0" anchor="ctr"/>
+          <a:lstStyle/>
+          <a:p>
+            <a:pPr indent="0" marL="0">
+              <a:buNone/>
+            </a:pPr>
+            <a:r>
+              <a:rPr lang="en-US" sz="1300" b="1" dirty="0">
+                <a:solidFill>
+                  <a:srgbClr val="1A2744"/>
+                </a:solidFill>
+                <a:latin typeface="Arial" pitchFamily="34" charset="0"/>
+                <a:ea typeface="Arial" pitchFamily="34" charset="-122"/>
+                <a:cs typeface="Arial" pitchFamily="34" charset="-120"/>
+              </a:rPr>
+              <a:t>コスパ・リピート</a:t>
+            </a:r>
+            <a:endParaRPr lang="en-US" sz="1300" dirty="0"/>
+          </a:p>
+        </p:txBody>
+      </p:sp>
+      <p:sp>
+        <p:nvSpPr>
+          <p:cNvPr id="38" name="Text 36"/>
+          <p:cNvSpPr/>
+          <p:nvPr/>
+        </p:nvSpPr>
+        <p:spPr>
+          <a:xfrm>
+            <a:off x="3429000" y="3246120"/>
+            <a:ext cx="2377440" cy="365760"/>
+          </a:xfrm>
+          <a:prstGeom prst="rect">
+            <a:avLst/>
+          </a:prstGeom>
+          <a:noFill/>
+          <a:ln/>
+        </p:spPr>
+        <p:txBody>
+          <a:bodyPr wrap="square" lIns="0" tIns="0" rIns="0" bIns="0" rtlCol="0" anchor="ctr"/>
+          <a:lstStyle/>
+          <a:p>
+            <a:pPr indent="0" marL="0">
+              <a:buNone/>
+            </a:pPr>
+            <a:r>
+              <a:rPr lang="en-US" sz="900" dirty="0">
+                <a:solidFill>
+                  <a:srgbClr val="64748B"/>
+                </a:solidFill>
+                <a:latin typeface="Arial" pitchFamily="34" charset="0"/>
+                <a:ea typeface="Arial" pitchFamily="34" charset="-122"/>
+                <a:cs typeface="Arial" pitchFamily="34" charset="-120"/>
+              </a:rPr>
+              <a:t>価格対価値の高さとリピート意向</a:t>
+            </a:r>
+            <a:endParaRPr lang="en-US" sz="900" dirty="0"/>
+          </a:p>
+        </p:txBody>
+      </p:sp>
+      <p:sp>
+        <p:nvSpPr>
+          <p:cNvPr id="39" name="Text 37"/>
+          <p:cNvSpPr/>
+          <p:nvPr/>
+        </p:nvSpPr>
+        <p:spPr>
+          <a:xfrm>
+            <a:off x="3429000" y="3657600"/>
+            <a:ext cx="2377440" cy="640080"/>
+          </a:xfrm>
+          <a:prstGeom prst="rect">
+            <a:avLst/>
+          </a:prstGeom>
+          <a:noFill/>
+          <a:ln/>
+        </p:spPr>
+        <p:txBody>
+          <a:bodyPr wrap="square" lIns="0" tIns="0" rIns="0" bIns="0" rtlCol="0" anchor="ctr"/>
+          <a:lstStyle/>
+          <a:p>
+            <a:pPr indent="0" marL="0">
+              <a:buNone/>
+            </a:pPr>
+            <a:r>
+              <a:rPr lang="en-US" sz="900" i="1" dirty="0">
+                <a:solidFill>
+                  <a:srgbClr val="3B7DD8"/>
+                </a:solidFill>
+                <a:latin typeface="Arial" pitchFamily="34" charset="0"/>
+                <a:ea typeface="Arial" pitchFamily="34" charset="-122"/>
+                <a:cs typeface="Arial" pitchFamily="34" charset="-120"/>
+              </a:rPr>
+              <a:t>「、全体的に満足のいく滞在となるでしょう。」</a:t>
+            </a:r>
+            <a:endParaRPr lang="en-US" sz="900" dirty="0"/>
+          </a:p>
+        </p:txBody>
+      </p:sp>
+      <p:sp>
+        <p:nvSpPr>
+          <p:cNvPr id="40" name="Shape 38"/>
+          <p:cNvSpPr/>
+          <p:nvPr/>
+        </p:nvSpPr>
+        <p:spPr>
+          <a:xfrm>
+            <a:off x="6126480" y="2880360"/>
+            <a:ext cx="2651760" cy="1600200"/>
+          </a:xfrm>
+          <a:prstGeom prst="rect">
+            <a:avLst/>
+          </a:prstGeom>
+          <a:solidFill>
+            <a:srgbClr val="FFFFFF"/>
+          </a:solidFill>
+          <a:ln/>
+          <a:effectLst>
+            <a:outerShdw sx="100000" sy="100000" kx="0" ky="0" algn="bl" rotWithShape="0" blurRad="50800" dist="25400" dir="8100000">
+              <a:srgbClr val="000000">
+                <a:alpha val="10000"/>
+              </a:srgbClr>
+            </a:outerShdw>
+          </a:effectLst>
+        </p:spPr>
+      </p:sp>
+      <p:sp>
+        <p:nvSpPr>
+          <p:cNvPr id="41" name="Shape 39"/>
+          <p:cNvSpPr/>
+          <p:nvPr/>
+        </p:nvSpPr>
+        <p:spPr>
+          <a:xfrm>
+            <a:off x="6126480" y="2880360"/>
+            <a:ext cx="54864" cy="1600200"/>
+          </a:xfrm>
+          <a:prstGeom prst="rect">
+            <a:avLst/>
+          </a:prstGeom>
+          <a:solidFill>
+            <a:srgbClr val="16A34A"/>
+          </a:solidFill>
+          <a:ln/>
+        </p:spPr>
+      </p:sp>
+      <p:sp>
+        <p:nvSpPr>
+          <p:cNvPr id="42" name="Shape 40"/>
+          <p:cNvSpPr/>
+          <p:nvPr/>
+        </p:nvSpPr>
+        <p:spPr>
+          <a:xfrm>
+            <a:off x="7955280" y="2953512"/>
+            <a:ext cx="658368" cy="228600"/>
+          </a:xfrm>
+          <a:prstGeom prst="rect">
+            <a:avLst/>
+          </a:prstGeom>
+          <a:solidFill>
+            <a:srgbClr val="DCFCE7"/>
+          </a:solidFill>
+          <a:ln/>
+        </p:spPr>
+      </p:sp>
+      <p:sp>
+        <p:nvSpPr>
+          <p:cNvPr id="43" name="Text 41"/>
+          <p:cNvSpPr/>
+          <p:nvPr/>
+        </p:nvSpPr>
+        <p:spPr>
+          <a:xfrm>
+            <a:off x="7955280" y="2953512"/>
+            <a:ext cx="658368" cy="228600"/>
+          </a:xfrm>
+          <a:prstGeom prst="rect">
+            <a:avLst/>
+          </a:prstGeom>
+          <a:noFill/>
+          <a:ln/>
+        </p:spPr>
+        <p:txBody>
+          <a:bodyPr wrap="square" lIns="0" tIns="0" rIns="0" bIns="0" rtlCol="0" anchor="ctr"/>
+          <a:lstStyle/>
+          <a:p>
+            <a:pPr algn="ctr" indent="0" marL="0">
+              <a:buNone/>
+            </a:pPr>
+            <a:r>
+              <a:rPr lang="en-US" sz="900" b="1" dirty="0">
+                <a:solidFill>
+                  <a:srgbClr val="16A34A"/>
+                </a:solidFill>
+                <a:latin typeface="Arial" pitchFamily="34" charset="0"/>
+                <a:ea typeface="Arial" pitchFamily="34" charset="-122"/>
+                <a:cs typeface="Arial" pitchFamily="34" charset="-120"/>
+              </a:rPr>
+              <a:t>19件</a:t>
+            </a:r>
+            <a:endParaRPr lang="en-US" sz="900" dirty="0"/>
+          </a:p>
+        </p:txBody>
+      </p:sp>
+      <p:sp>
+        <p:nvSpPr>
+          <p:cNvPr id="44" name="Text 42"/>
+          <p:cNvSpPr/>
+          <p:nvPr/>
+        </p:nvSpPr>
+        <p:spPr>
+          <a:xfrm>
+            <a:off x="6263640" y="2953512"/>
             <a:ext cx="1645920" cy="274320"/>
           </a:xfrm>
           <a:prstGeom prst="rect">
@@ -8927,13 +9150,13 @@
       </p:sp>
       <p:sp>
         <p:nvSpPr>
-          <p:cNvPr id="38" name="Text 36"/>
-          <p:cNvSpPr/>
-          <p:nvPr/>
-        </p:nvSpPr>
-        <p:spPr>
-          <a:xfrm>
-            <a:off x="3429000" y="3246120"/>
+          <p:cNvPr id="45" name="Text 43"/>
+          <p:cNvSpPr/>
+          <p:nvPr/>
+        </p:nvSpPr>
+        <p:spPr>
+          <a:xfrm>
+            <a:off x="6263640" y="3246120"/>
             <a:ext cx="2377440" cy="365760"/>
           </a:xfrm>
           <a:prstGeom prst="rect">
@@ -8966,13 +9189,13 @@
       </p:sp>
       <p:sp>
         <p:nvSpPr>
-          <p:cNvPr id="39" name="Text 37"/>
-          <p:cNvSpPr/>
-          <p:nvPr/>
-        </p:nvSpPr>
-        <p:spPr>
-          <a:xfrm>
-            <a:off x="3429000" y="3657600"/>
+          <p:cNvPr id="46" name="Text 44"/>
+          <p:cNvSpPr/>
+          <p:nvPr/>
+        </p:nvSpPr>
+        <p:spPr>
+          <a:xfrm>
+            <a:off x="6263640" y="3657600"/>
             <a:ext cx="2377440" cy="640080"/>
           </a:xfrm>
           <a:prstGeom prst="rect">
@@ -8998,229 +9221,6 @@
                 <a:cs typeface="Arial" pitchFamily="34" charset="-120"/>
               </a:rPr>
               <a:t>「スが良く、朝食も美味しかったです。 大浴場のシャワーが少なく」</a:t>
-            </a:r>
-            <a:endParaRPr lang="en-US" sz="900" dirty="0"/>
-          </a:p>
-        </p:txBody>
-      </p:sp>
-      <p:sp>
-        <p:nvSpPr>
-          <p:cNvPr id="40" name="Shape 38"/>
-          <p:cNvSpPr/>
-          <p:nvPr/>
-        </p:nvSpPr>
-        <p:spPr>
-          <a:xfrm>
-            <a:off x="6126480" y="2880360"/>
-            <a:ext cx="2651760" cy="1600200"/>
-          </a:xfrm>
-          <a:prstGeom prst="rect">
-            <a:avLst/>
-          </a:prstGeom>
-          <a:solidFill>
-            <a:srgbClr val="FFFFFF"/>
-          </a:solidFill>
-          <a:ln/>
-          <a:effectLst>
-            <a:outerShdw sx="100000" sy="100000" kx="0" ky="0" algn="bl" rotWithShape="0" blurRad="50800" dist="25400" dir="8100000">
-              <a:srgbClr val="000000">
-                <a:alpha val="10000"/>
-              </a:srgbClr>
-            </a:outerShdw>
-          </a:effectLst>
-        </p:spPr>
-      </p:sp>
-      <p:sp>
-        <p:nvSpPr>
-          <p:cNvPr id="41" name="Shape 39"/>
-          <p:cNvSpPr/>
-          <p:nvPr/>
-        </p:nvSpPr>
-        <p:spPr>
-          <a:xfrm>
-            <a:off x="6126480" y="2880360"/>
-            <a:ext cx="54864" cy="1600200"/>
-          </a:xfrm>
-          <a:prstGeom prst="rect">
-            <a:avLst/>
-          </a:prstGeom>
-          <a:solidFill>
-            <a:srgbClr val="16A34A"/>
-          </a:solidFill>
-          <a:ln/>
-        </p:spPr>
-      </p:sp>
-      <p:sp>
-        <p:nvSpPr>
-          <p:cNvPr id="42" name="Shape 40"/>
-          <p:cNvSpPr/>
-          <p:nvPr/>
-        </p:nvSpPr>
-        <p:spPr>
-          <a:xfrm>
-            <a:off x="7955280" y="2953512"/>
-            <a:ext cx="658368" cy="228600"/>
-          </a:xfrm>
-          <a:prstGeom prst="rect">
-            <a:avLst/>
-          </a:prstGeom>
-          <a:solidFill>
-            <a:srgbClr val="DCFCE7"/>
-          </a:solidFill>
-          <a:ln/>
-        </p:spPr>
-      </p:sp>
-      <p:sp>
-        <p:nvSpPr>
-          <p:cNvPr id="43" name="Text 41"/>
-          <p:cNvSpPr/>
-          <p:nvPr/>
-        </p:nvSpPr>
-        <p:spPr>
-          <a:xfrm>
-            <a:off x="7955280" y="2953512"/>
-            <a:ext cx="658368" cy="228600"/>
-          </a:xfrm>
-          <a:prstGeom prst="rect">
-            <a:avLst/>
-          </a:prstGeom>
-          <a:noFill/>
-          <a:ln/>
-        </p:spPr>
-        <p:txBody>
-          <a:bodyPr wrap="square" lIns="0" tIns="0" rIns="0" bIns="0" rtlCol="0" anchor="ctr"/>
-          <a:lstStyle/>
-          <a:p>
-            <a:pPr algn="ctr" indent="0" marL="0">
-              <a:buNone/>
-            </a:pPr>
-            <a:r>
-              <a:rPr lang="en-US" sz="900" b="1" dirty="0">
-                <a:solidFill>
-                  <a:srgbClr val="16A34A"/>
-                </a:solidFill>
-                <a:latin typeface="Arial" pitchFamily="34" charset="0"/>
-                <a:ea typeface="Arial" pitchFamily="34" charset="-122"/>
-                <a:cs typeface="Arial" pitchFamily="34" charset="-120"/>
-              </a:rPr>
-              <a:t>10件</a:t>
-            </a:r>
-            <a:endParaRPr lang="en-US" sz="900" dirty="0"/>
-          </a:p>
-        </p:txBody>
-      </p:sp>
-      <p:sp>
-        <p:nvSpPr>
-          <p:cNvPr id="44" name="Text 42"/>
-          <p:cNvSpPr/>
-          <p:nvPr/>
-        </p:nvSpPr>
-        <p:spPr>
-          <a:xfrm>
-            <a:off x="6263640" y="2953512"/>
-            <a:ext cx="1645920" cy="274320"/>
-          </a:xfrm>
-          <a:prstGeom prst="rect">
-            <a:avLst/>
-          </a:prstGeom>
-          <a:noFill/>
-          <a:ln/>
-        </p:spPr>
-        <p:txBody>
-          <a:bodyPr wrap="square" lIns="0" tIns="0" rIns="0" bIns="0" rtlCol="0" anchor="ctr"/>
-          <a:lstStyle/>
-          <a:p>
-            <a:pPr indent="0" marL="0">
-              <a:buNone/>
-            </a:pPr>
-            <a:r>
-              <a:rPr lang="en-US" sz="1300" b="1" dirty="0">
-                <a:solidFill>
-                  <a:srgbClr val="1A2744"/>
-                </a:solidFill>
-                <a:latin typeface="Arial" pitchFamily="34" charset="0"/>
-                <a:ea typeface="Arial" pitchFamily="34" charset="-122"/>
-                <a:cs typeface="Arial" pitchFamily="34" charset="-120"/>
-              </a:rPr>
-              <a:t>コスパ・リピート</a:t>
-            </a:r>
-            <a:endParaRPr lang="en-US" sz="1300" dirty="0"/>
-          </a:p>
-        </p:txBody>
-      </p:sp>
-      <p:sp>
-        <p:nvSpPr>
-          <p:cNvPr id="45" name="Text 43"/>
-          <p:cNvSpPr/>
-          <p:nvPr/>
-        </p:nvSpPr>
-        <p:spPr>
-          <a:xfrm>
-            <a:off x="6263640" y="3246120"/>
-            <a:ext cx="2377440" cy="365760"/>
-          </a:xfrm>
-          <a:prstGeom prst="rect">
-            <a:avLst/>
-          </a:prstGeom>
-          <a:noFill/>
-          <a:ln/>
-        </p:spPr>
-        <p:txBody>
-          <a:bodyPr wrap="square" lIns="0" tIns="0" rIns="0" bIns="0" rtlCol="0" anchor="ctr"/>
-          <a:lstStyle/>
-          <a:p>
-            <a:pPr indent="0" marL="0">
-              <a:buNone/>
-            </a:pPr>
-            <a:r>
-              <a:rPr lang="en-US" sz="900" dirty="0">
-                <a:solidFill>
-                  <a:srgbClr val="64748B"/>
-                </a:solidFill>
-                <a:latin typeface="Arial" pitchFamily="34" charset="0"/>
-                <a:ea typeface="Arial" pitchFamily="34" charset="-122"/>
-                <a:cs typeface="Arial" pitchFamily="34" charset="-120"/>
-              </a:rPr>
-              <a:t>価格対価値の高さとリピート意向</a:t>
-            </a:r>
-            <a:endParaRPr lang="en-US" sz="900" dirty="0"/>
-          </a:p>
-        </p:txBody>
-      </p:sp>
-      <p:sp>
-        <p:nvSpPr>
-          <p:cNvPr id="46" name="Text 44"/>
-          <p:cNvSpPr/>
-          <p:nvPr/>
-        </p:nvSpPr>
-        <p:spPr>
-          <a:xfrm>
-            <a:off x="6263640" y="3657600"/>
-            <a:ext cx="2377440" cy="640080"/>
-          </a:xfrm>
-          <a:prstGeom prst="rect">
-            <a:avLst/>
-          </a:prstGeom>
-          <a:noFill/>
-          <a:ln/>
-        </p:spPr>
-        <p:txBody>
-          <a:bodyPr wrap="square" lIns="0" tIns="0" rIns="0" bIns="0" rtlCol="0" anchor="ctr"/>
-          <a:lstStyle/>
-          <a:p>
-            <a:pPr indent="0" marL="0">
-              <a:buNone/>
-            </a:pPr>
-            <a:r>
-              <a:rPr lang="en-US" sz="900" i="1" dirty="0">
-                <a:solidFill>
-                  <a:srgbClr val="3B7DD8"/>
-                </a:solidFill>
-                <a:latin typeface="Arial" pitchFamily="34" charset="0"/>
-                <a:ea typeface="Arial" pitchFamily="34" charset="-122"/>
-                <a:cs typeface="Arial" pitchFamily="34" charset="-120"/>
-              </a:rPr>
-              <a:t>「、全体的に満足のいく滞在となるでしょう。」</a:t>
             </a:r>
             <a:endParaRPr lang="en-US" sz="900" dirty="0"/>
           </a:p>
@@ -10116,7 +10116,7 @@
                           <a:ea typeface="Arial" pitchFamily="34" charset="-122"/>
                           <a:cs typeface="Arial" pitchFamily="34" charset="-120"/>
                         </a:rPr>
-                        <a:t>朝食品質</a:t>
+                        <a:t>部屋狭小感</a:t>
                       </a:r>
                       <a:endParaRPr lang="en-US" sz="900" dirty="0">
                         <a:latin typeface="Arial" charset="0"/>
@@ -10184,7 +10184,7 @@
                           <a:ea typeface="Arial" pitchFamily="34" charset="-122"/>
                           <a:cs typeface="Arial" pitchFamily="34" charset="-120"/>
                         </a:rPr>
-                        <a:t>朝食が値段の割に貧相。つけないほうが良いと思う。</a:t>
+                        <a:t>値段割に部屋が狭い</a:t>
                       </a:r>
                       <a:endParaRPr lang="en-US" sz="900" dirty="0">
                         <a:latin typeface="Arial" charset="0"/>
@@ -10390,7 +10390,7 @@
                           <a:ea typeface="Arial" pitchFamily="34" charset="-122"/>
                           <a:cs typeface="Arial" pitchFamily="34" charset="-120"/>
                         </a:rPr>
-                        <a:t>口コミ返信率</a:t>
+                        <a:t>通信環境</a:t>
                       </a:r>
                       <a:endParaRPr lang="en-US" sz="900" dirty="0">
                         <a:latin typeface="Arial" charset="0"/>
@@ -10458,7 +10458,7 @@
                           <a:ea typeface="Arial" pitchFamily="34" charset="-122"/>
                           <a:cs typeface="Arial" pitchFamily="34" charset="-120"/>
                         </a:rPr>
-                        <a:t>口コミへの返信対応を強化する余地あり</a:t>
+                        <a:t>WiFiが弱かった</a:t>
                       </a:r>
                       <a:endParaRPr lang="en-US" sz="900" dirty="0">
                         <a:latin typeface="Arial" charset="0"/>
@@ -10526,7 +10526,7 @@
                           <a:ea typeface="Arial" pitchFamily="34" charset="-122"/>
                           <a:cs typeface="Arial" pitchFamily="34" charset="-120"/>
                         </a:rPr>
-                        <a:t>0件</a:t>
+                        <a:t>2件</a:t>
                       </a:r>
                       <a:endParaRPr lang="en-US" sz="900" dirty="0">
                         <a:latin typeface="Arial" charset="0"/>
@@ -10590,13 +10590,13 @@
                       <a:r>
                         <a:rPr lang="en-US" sz="1200" b="1" dirty="0">
                           <a:solidFill>
-                            <a:srgbClr val="94A3B8"/>
+                            <a:srgbClr val="D4A843"/>
                           </a:solidFill>
                           <a:latin typeface="Arial" pitchFamily="34" charset="0"/>
                           <a:ea typeface="Arial" pitchFamily="34" charset="-122"/>
                           <a:cs typeface="Arial" pitchFamily="34" charset="-120"/>
                         </a:rPr>
-                        <a:t>C</a:t>
+                        <a:t>B</a:t>
                       </a:r>
                       <a:endParaRPr lang="en-US" sz="1200" dirty="0">
                         <a:latin typeface="Arial" charset="0"/>
@@ -10664,7 +10664,7 @@
                           <a:ea typeface="Arial" pitchFamily="34" charset="-122"/>
                           <a:cs typeface="Arial" pitchFamily="34" charset="-120"/>
                         </a:rPr>
-                        <a:t>サービス改善</a:t>
+                        <a:t>朝食品質</a:t>
                       </a:r>
                       <a:endParaRPr lang="en-US" sz="900" dirty="0">
                         <a:latin typeface="Arial" charset="0"/>
@@ -10732,7 +10732,7 @@
                           <a:ea typeface="Arial" pitchFamily="34" charset="-122"/>
                           <a:cs typeface="Arial" pitchFamily="34" charset="-120"/>
                         </a:rPr>
-                        <a:t>継続的なサービス品質向上が必要</a:t>
+                        <a:t>朝食が値段の割に貧相。つけないほうが良いと思う。</a:t>
                       </a:r>
                       <a:endParaRPr lang="en-US" sz="900" dirty="0">
                         <a:latin typeface="Arial" charset="0"/>
@@ -10800,7 +10800,7 @@
                           <a:ea typeface="Arial" pitchFamily="34" charset="-122"/>
                           <a:cs typeface="Arial" pitchFamily="34" charset="-120"/>
                         </a:rPr>
-                        <a:t>0件</a:t>
+                        <a:t>2件</a:t>
                       </a:r>
                       <a:endParaRPr lang="en-US" sz="900" dirty="0">
                         <a:latin typeface="Arial" charset="0"/>
@@ -10864,13 +10864,13 @@
                       <a:r>
                         <a:rPr lang="en-US" sz="1200" b="1" dirty="0">
                           <a:solidFill>
-                            <a:srgbClr val="94A3B8"/>
+                            <a:srgbClr val="D4A843"/>
                           </a:solidFill>
                           <a:latin typeface="Arial" pitchFamily="34" charset="0"/>
                           <a:ea typeface="Arial" pitchFamily="34" charset="-122"/>
                           <a:cs typeface="Arial" pitchFamily="34" charset="-120"/>
                         </a:rPr>
-                        <a:t>C</a:t>
+                        <a:t>B</a:t>
                       </a:r>
                       <a:endParaRPr lang="en-US" sz="1200" dirty="0">
                         <a:latin typeface="Arial" charset="0"/>
@@ -10938,7 +10938,7 @@
                           <a:ea typeface="Arial" pitchFamily="34" charset="-122"/>
                           <a:cs typeface="Arial" pitchFamily="34" charset="-120"/>
                         </a:rPr>
-                        <a:t>設備メンテナンス</a:t>
+                        <a:t>水回り</a:t>
                       </a:r>
                       <a:endParaRPr lang="en-US" sz="900" dirty="0">
                         <a:latin typeface="Arial" charset="0"/>
@@ -11006,7 +11006,7 @@
                           <a:ea typeface="Arial" pitchFamily="34" charset="-122"/>
                           <a:cs typeface="Arial" pitchFamily="34" charset="-120"/>
                         </a:rPr>
-                        <a:t>定期的なメンテナンス体制の整備</a:t>
+                        <a:t>女性用のアメニティが少ないかも？化粧水と乳液は持参しないとないです。大浴場利用時</a:t>
                       </a:r>
                       <a:endParaRPr lang="en-US" sz="900" dirty="0">
                         <a:latin typeface="Arial" charset="0"/>
@@ -11074,7 +11074,7 @@
                           <a:ea typeface="Arial" pitchFamily="34" charset="-122"/>
                           <a:cs typeface="Arial" pitchFamily="34" charset="-120"/>
                         </a:rPr>
-                        <a:t>0件</a:t>
+                        <a:t>2件</a:t>
                       </a:r>
                       <a:endParaRPr lang="en-US" sz="900" dirty="0">
                         <a:latin typeface="Arial" charset="0"/>
@@ -11122,6 +11122,280 @@
                     </a:lnB>
                     <a:solidFill>
                       <a:srgbClr val="E8EFF8"/>
+                    </a:solidFill>
+                  </a:tcPr>
+                </a:tc>
+              </a:tr>
+              <a:tr h="320040">
+                <a:tc>
+                  <a:txBody>
+                    <a:bodyPr/>
+                    <a:lstStyle/>
+                    <a:p>
+                      <a:pPr algn="ctr" indent="0" marL="0">
+                        <a:buNone/>
+                      </a:pPr>
+                      <a:r>
+                        <a:rPr lang="en-US" sz="1200" b="1" dirty="0">
+                          <a:solidFill>
+                            <a:srgbClr val="D4A843"/>
+                          </a:solidFill>
+                          <a:latin typeface="Arial" pitchFamily="34" charset="0"/>
+                          <a:ea typeface="Arial" pitchFamily="34" charset="-122"/>
+                          <a:cs typeface="Arial" pitchFamily="34" charset="-120"/>
+                        </a:rPr>
+                        <a:t>B</a:t>
+                      </a:r>
+                      <a:endParaRPr lang="en-US" sz="1200" dirty="0">
+                        <a:latin typeface="Arial" charset="0"/>
+                        <a:ea typeface="Arial" charset="0"/>
+                        <a:cs typeface="Arial" charset="0"/>
+                      </a:endParaRPr>
+                    </a:p>
+                  </a:txBody>
+                  <a:tcPr marL="91440" marR="91440" marT="45720" marB="45720">
+                    <a:lnL w="6350" cap="flat" cmpd="sng" algn="ctr">
+                      <a:solidFill>
+                        <a:srgbClr val="CBD5E1"/>
+                      </a:solidFill>
+                      <a:prstDash val="solid"/>
+                      <a:round/>
+                      <a:headEnd type="none" w="med" len="med"/>
+                      <a:tailEnd type="none" w="med" len="med"/>
+                    </a:lnL>
+                    <a:lnR w="6350" cap="flat" cmpd="sng" algn="ctr">
+                      <a:solidFill>
+                        <a:srgbClr val="CBD5E1"/>
+                      </a:solidFill>
+                      <a:prstDash val="solid"/>
+                      <a:round/>
+                      <a:headEnd type="none" w="med" len="med"/>
+                      <a:tailEnd type="none" w="med" len="med"/>
+                    </a:lnR>
+                    <a:lnT w="6350" cap="flat" cmpd="sng" algn="ctr">
+                      <a:solidFill>
+                        <a:srgbClr val="CBD5E1"/>
+                      </a:solidFill>
+                      <a:prstDash val="solid"/>
+                      <a:round/>
+                      <a:headEnd type="none" w="med" len="med"/>
+                      <a:tailEnd type="none" w="med" len="med"/>
+                    </a:lnT>
+                    <a:lnB w="6350" cap="flat" cmpd="sng" algn="ctr">
+                      <a:solidFill>
+                        <a:srgbClr val="CBD5E1"/>
+                      </a:solidFill>
+                      <a:prstDash val="solid"/>
+                      <a:round/>
+                      <a:headEnd type="none" w="med" len="med"/>
+                      <a:tailEnd type="none" w="med" len="med"/>
+                    </a:lnB>
+                    <a:solidFill>
+                      <a:srgbClr val="FFFFFF"/>
+                    </a:solidFill>
+                  </a:tcPr>
+                </a:tc>
+                <a:tc>
+                  <a:txBody>
+                    <a:bodyPr/>
+                    <a:lstStyle/>
+                    <a:p>
+                      <a:pPr indent="0" marL="0">
+                        <a:buNone/>
+                      </a:pPr>
+                      <a:r>
+                        <a:rPr lang="en-US" sz="900" b="1" dirty="0">
+                          <a:solidFill>
+                            <a:srgbClr val="334155"/>
+                          </a:solidFill>
+                          <a:latin typeface="Arial" pitchFamily="34" charset="0"/>
+                          <a:ea typeface="Arial" pitchFamily="34" charset="-122"/>
+                          <a:cs typeface="Arial" pitchFamily="34" charset="-120"/>
+                        </a:rPr>
+                        <a:t>駐車場・立地</a:t>
+                      </a:r>
+                      <a:endParaRPr lang="en-US" sz="900" dirty="0">
+                        <a:latin typeface="Arial" charset="0"/>
+                        <a:ea typeface="Arial" charset="0"/>
+                        <a:cs typeface="Arial" charset="0"/>
+                      </a:endParaRPr>
+                    </a:p>
+                  </a:txBody>
+                  <a:tcPr marL="91440" marR="91440" marT="45720" marB="45720">
+                    <a:lnL w="6350" cap="flat" cmpd="sng" algn="ctr">
+                      <a:solidFill>
+                        <a:srgbClr val="CBD5E1"/>
+                      </a:solidFill>
+                      <a:prstDash val="solid"/>
+                      <a:round/>
+                      <a:headEnd type="none" w="med" len="med"/>
+                      <a:tailEnd type="none" w="med" len="med"/>
+                    </a:lnL>
+                    <a:lnR w="6350" cap="flat" cmpd="sng" algn="ctr">
+                      <a:solidFill>
+                        <a:srgbClr val="CBD5E1"/>
+                      </a:solidFill>
+                      <a:prstDash val="solid"/>
+                      <a:round/>
+                      <a:headEnd type="none" w="med" len="med"/>
+                      <a:tailEnd type="none" w="med" len="med"/>
+                    </a:lnR>
+                    <a:lnT w="6350" cap="flat" cmpd="sng" algn="ctr">
+                      <a:solidFill>
+                        <a:srgbClr val="CBD5E1"/>
+                      </a:solidFill>
+                      <a:prstDash val="solid"/>
+                      <a:round/>
+                      <a:headEnd type="none" w="med" len="med"/>
+                      <a:tailEnd type="none" w="med" len="med"/>
+                    </a:lnT>
+                    <a:lnB w="6350" cap="flat" cmpd="sng" algn="ctr">
+                      <a:solidFill>
+                        <a:srgbClr val="CBD5E1"/>
+                      </a:solidFill>
+                      <a:prstDash val="solid"/>
+                      <a:round/>
+                      <a:headEnd type="none" w="med" len="med"/>
+                      <a:tailEnd type="none" w="med" len="med"/>
+                    </a:lnB>
+                    <a:solidFill>
+                      <a:srgbClr val="FFFFFF"/>
+                    </a:solidFill>
+                  </a:tcPr>
+                </a:tc>
+                <a:tc>
+                  <a:txBody>
+                    <a:bodyPr/>
+                    <a:lstStyle/>
+                    <a:p>
+                      <a:pPr indent="0" marL="0">
+                        <a:buNone/>
+                      </a:pPr>
+                      <a:r>
+                        <a:rPr lang="en-US" sz="900" dirty="0">
+                          <a:solidFill>
+                            <a:srgbClr val="64748B"/>
+                          </a:solidFill>
+                          <a:latin typeface="Arial" pitchFamily="34" charset="0"/>
+                          <a:ea typeface="Arial" pitchFamily="34" charset="-122"/>
+                          <a:cs typeface="Arial" pitchFamily="34" charset="-120"/>
+                        </a:rPr>
+                        <a:t>近くの駐車場はかなり高額なので、将来的にはレストランが駐車場と提携してくれるとい</a:t>
+                      </a:r>
+                      <a:endParaRPr lang="en-US" sz="900" dirty="0">
+                        <a:latin typeface="Arial" charset="0"/>
+                        <a:ea typeface="Arial" charset="0"/>
+                        <a:cs typeface="Arial" charset="0"/>
+                      </a:endParaRPr>
+                    </a:p>
+                  </a:txBody>
+                  <a:tcPr marL="91440" marR="91440" marT="45720" marB="45720">
+                    <a:lnL w="6350" cap="flat" cmpd="sng" algn="ctr">
+                      <a:solidFill>
+                        <a:srgbClr val="CBD5E1"/>
+                      </a:solidFill>
+                      <a:prstDash val="solid"/>
+                      <a:round/>
+                      <a:headEnd type="none" w="med" len="med"/>
+                      <a:tailEnd type="none" w="med" len="med"/>
+                    </a:lnL>
+                    <a:lnR w="6350" cap="flat" cmpd="sng" algn="ctr">
+                      <a:solidFill>
+                        <a:srgbClr val="CBD5E1"/>
+                      </a:solidFill>
+                      <a:prstDash val="solid"/>
+                      <a:round/>
+                      <a:headEnd type="none" w="med" len="med"/>
+                      <a:tailEnd type="none" w="med" len="med"/>
+                    </a:lnR>
+                    <a:lnT w="6350" cap="flat" cmpd="sng" algn="ctr">
+                      <a:solidFill>
+                        <a:srgbClr val="CBD5E1"/>
+                      </a:solidFill>
+                      <a:prstDash val="solid"/>
+                      <a:round/>
+                      <a:headEnd type="none" w="med" len="med"/>
+                      <a:tailEnd type="none" w="med" len="med"/>
+                    </a:lnT>
+                    <a:lnB w="6350" cap="flat" cmpd="sng" algn="ctr">
+                      <a:solidFill>
+                        <a:srgbClr val="CBD5E1"/>
+                      </a:solidFill>
+                      <a:prstDash val="solid"/>
+                      <a:round/>
+                      <a:headEnd type="none" w="med" len="med"/>
+                      <a:tailEnd type="none" w="med" len="med"/>
+                    </a:lnB>
+                    <a:solidFill>
+                      <a:srgbClr val="FFFFFF"/>
+                    </a:solidFill>
+                  </a:tcPr>
+                </a:tc>
+                <a:tc>
+                  <a:txBody>
+                    <a:bodyPr/>
+                    <a:lstStyle/>
+                    <a:p>
+                      <a:pPr algn="ctr" indent="0" marL="0">
+                        <a:buNone/>
+                      </a:pPr>
+                      <a:r>
+                        <a:rPr lang="en-US" sz="900" dirty="0">
+                          <a:solidFill>
+                            <a:srgbClr val="334155"/>
+                          </a:solidFill>
+                          <a:latin typeface="Arial" pitchFamily="34" charset="0"/>
+                          <a:ea typeface="Arial" pitchFamily="34" charset="-122"/>
+                          <a:cs typeface="Arial" pitchFamily="34" charset="-120"/>
+                        </a:rPr>
+                        <a:t>1件</a:t>
+                      </a:r>
+                      <a:endParaRPr lang="en-US" sz="900" dirty="0">
+                        <a:latin typeface="Arial" charset="0"/>
+                        <a:ea typeface="Arial" charset="0"/>
+                        <a:cs typeface="Arial" charset="0"/>
+                      </a:endParaRPr>
+                    </a:p>
+                  </a:txBody>
+                  <a:tcPr marL="91440" marR="91440" marT="45720" marB="45720">
+                    <a:lnL w="6350" cap="flat" cmpd="sng" algn="ctr">
+                      <a:solidFill>
+                        <a:srgbClr val="CBD5E1"/>
+                      </a:solidFill>
+                      <a:prstDash val="solid"/>
+                      <a:round/>
+                      <a:headEnd type="none" w="med" len="med"/>
+                      <a:tailEnd type="none" w="med" len="med"/>
+                    </a:lnL>
+                    <a:lnR w="6350" cap="flat" cmpd="sng" algn="ctr">
+                      <a:solidFill>
+                        <a:srgbClr val="CBD5E1"/>
+                      </a:solidFill>
+                      <a:prstDash val="solid"/>
+                      <a:round/>
+                      <a:headEnd type="none" w="med" len="med"/>
+                      <a:tailEnd type="none" w="med" len="med"/>
+                    </a:lnR>
+                    <a:lnT w="6350" cap="flat" cmpd="sng" algn="ctr">
+                      <a:solidFill>
+                        <a:srgbClr val="CBD5E1"/>
+                      </a:solidFill>
+                      <a:prstDash val="solid"/>
+                      <a:round/>
+                      <a:headEnd type="none" w="med" len="med"/>
+                      <a:tailEnd type="none" w="med" len="med"/>
+                    </a:lnT>
+                    <a:lnB w="6350" cap="flat" cmpd="sng" algn="ctr">
+                      <a:solidFill>
+                        <a:srgbClr val="CBD5E1"/>
+                      </a:solidFill>
+                      <a:prstDash val="solid"/>
+                      <a:round/>
+                      <a:headEnd type="none" w="med" len="med"/>
+                      <a:tailEnd type="none" w="med" len="med"/>
+                    </a:lnB>
+                    <a:solidFill>
+                      <a:srgbClr val="FFFFFF"/>
                     </a:solidFill>
                   </a:tcPr>
                 </a:tc>
@@ -11806,7 +12080,7 @@
                 <a:ea typeface="Arial" pitchFamily="34" charset="-122"/>
                 <a:cs typeface="Arial" pitchFamily="34" charset="-120"/>
               </a:rPr>
-              <a:t>(2) 朝食品質の即時改善</a:t>
+              <a:t>(2) 部屋利用満足度の最大化</a:t>
             </a:r>
             <a:endParaRPr lang="en-US" sz="1200" dirty="0"/>
           </a:p>
@@ -11821,6 +12095,390 @@
         <p:spPr>
           <a:xfrm>
             <a:off x="4800600" y="1600200"/>
+            <a:ext cx="3657600" cy="1188720"/>
+          </a:xfrm>
+          <a:prstGeom prst="rect">
+            <a:avLst/>
+          </a:prstGeom>
+          <a:noFill/>
+          <a:ln/>
+        </p:spPr>
+        <p:txBody>
+          <a:bodyPr wrap="square" lIns="0" tIns="0" rIns="0" bIns="0" rtlCol="0" anchor="ctr"/>
+          <a:lstStyle/>
+          <a:p>
+            <a:pPr marL="342900" indent="-342900">
+              <a:spcAft>
+                <a:spcPts val="300"/>
+              </a:spcAft>
+              <a:buSzPct val="100000"/>
+              <a:buChar char="•"/>
+            </a:pPr>
+            <a:r>
+              <a:rPr lang="en-US" sz="900" dirty="0">
+                <a:solidFill>
+                  <a:srgbClr val="334155"/>
+                </a:solidFill>
+                <a:latin typeface="Arial" pitchFamily="34" charset="0"/>
+                <a:ea typeface="Arial" pitchFamily="34" charset="-122"/>
+                <a:cs typeface="Arial" pitchFamily="34" charset="-120"/>
+              </a:rPr>
+              <a:t>収納スペースの整理・最適化</a:t>
+            </a:r>
+            <a:endParaRPr lang="en-US" sz="900" dirty="0"/>
+          </a:p>
+          <a:p>
+            <a:pPr marL="342900" indent="-342900">
+              <a:spcAft>
+                <a:spcPts val="300"/>
+              </a:spcAft>
+              <a:buSzPct val="100000"/>
+              <a:buChar char="•"/>
+            </a:pPr>
+            <a:r>
+              <a:rPr lang="en-US" sz="900" dirty="0">
+                <a:solidFill>
+                  <a:srgbClr val="334155"/>
+                </a:solidFill>
+                <a:latin typeface="Arial" pitchFamily="34" charset="0"/>
+                <a:ea typeface="Arial" pitchFamily="34" charset="-122"/>
+                <a:cs typeface="Arial" pitchFamily="34" charset="-120"/>
+              </a:rPr>
+              <a:t>荷物預かりサービスの案内強化</a:t>
+            </a:r>
+            <a:endParaRPr lang="en-US" sz="900" dirty="0"/>
+          </a:p>
+          <a:p>
+            <a:pPr marL="342900" indent="-342900">
+              <a:spcAft>
+                <a:spcPts val="300"/>
+              </a:spcAft>
+              <a:buSzPct val="100000"/>
+              <a:buChar char="•"/>
+            </a:pPr>
+            <a:r>
+              <a:rPr lang="en-US" sz="900" dirty="0">
+                <a:solidFill>
+                  <a:srgbClr val="334155"/>
+                </a:solidFill>
+                <a:latin typeface="Arial" pitchFamily="34" charset="0"/>
+                <a:ea typeface="Arial" pitchFamily="34" charset="-122"/>
+                <a:cs typeface="Arial" pitchFamily="34" charset="-120"/>
+              </a:rPr>
+              <a:t>部屋タイプ別の使い勝手改善ガイド作成</a:t>
+            </a:r>
+            <a:endParaRPr lang="en-US" sz="900" dirty="0"/>
+          </a:p>
+          <a:p>
+            <a:pPr marL="342900" indent="-342900">
+              <a:spcAft>
+                <a:spcPts val="300"/>
+              </a:spcAft>
+              <a:buSzPct val="100000"/>
+              <a:buChar char="•"/>
+            </a:pPr>
+            <a:r>
+              <a:rPr lang="en-US" sz="900" dirty="0">
+                <a:solidFill>
+                  <a:srgbClr val="334155"/>
+                </a:solidFill>
+                <a:latin typeface="Arial" pitchFamily="34" charset="0"/>
+                <a:ea typeface="Arial" pitchFamily="34" charset="-122"/>
+                <a:cs typeface="Arial" pitchFamily="34" charset="-120"/>
+              </a:rPr>
+              <a:t>コンパクトな部屋の魅力を訴求するOTA説明文改訂</a:t>
+            </a:r>
+            <a:endParaRPr lang="en-US" sz="900" dirty="0"/>
+          </a:p>
+        </p:txBody>
+      </p:sp>
+      <p:sp>
+        <p:nvSpPr>
+          <p:cNvPr id="14" name="Shape 12"/>
+          <p:cNvSpPr/>
+          <p:nvPr/>
+        </p:nvSpPr>
+        <p:spPr>
+          <a:xfrm>
+            <a:off x="457200" y="3017520"/>
+            <a:ext cx="3977640" cy="1600200"/>
+          </a:xfrm>
+          <a:prstGeom prst="rect">
+            <a:avLst/>
+          </a:prstGeom>
+          <a:solidFill>
+            <a:srgbClr val="FFFFFF"/>
+          </a:solidFill>
+          <a:ln/>
+          <a:effectLst>
+            <a:outerShdw sx="100000" sy="100000" kx="0" ky="0" algn="bl" rotWithShape="0" blurRad="50800" dist="25400" dir="8100000">
+              <a:srgbClr val="000000">
+                <a:alpha val="10000"/>
+              </a:srgbClr>
+            </a:outerShdw>
+          </a:effectLst>
+        </p:spPr>
+      </p:sp>
+      <p:sp>
+        <p:nvSpPr>
+          <p:cNvPr id="15" name="Shape 13"/>
+          <p:cNvSpPr/>
+          <p:nvPr/>
+        </p:nvSpPr>
+        <p:spPr>
+          <a:xfrm>
+            <a:off x="457200" y="3017520"/>
+            <a:ext cx="54864" cy="1600200"/>
+          </a:xfrm>
+          <a:prstGeom prst="rect">
+            <a:avLst/>
+          </a:prstGeom>
+          <a:solidFill>
+            <a:srgbClr val="3B7DD8"/>
+          </a:solidFill>
+          <a:ln/>
+        </p:spPr>
+      </p:sp>
+      <p:sp>
+        <p:nvSpPr>
+          <p:cNvPr id="16" name="Text 14"/>
+          <p:cNvSpPr/>
+          <p:nvPr/>
+        </p:nvSpPr>
+        <p:spPr>
+          <a:xfrm>
+            <a:off x="594360" y="3063240"/>
+            <a:ext cx="3657600" cy="320040"/>
+          </a:xfrm>
+          <a:prstGeom prst="rect">
+            <a:avLst/>
+          </a:prstGeom>
+          <a:noFill/>
+          <a:ln/>
+        </p:spPr>
+        <p:txBody>
+          <a:bodyPr wrap="square" lIns="0" tIns="0" rIns="0" bIns="0" rtlCol="0" anchor="ctr"/>
+          <a:lstStyle/>
+          <a:p>
+            <a:pPr indent="0" marL="0">
+              <a:buNone/>
+            </a:pPr>
+            <a:r>
+              <a:rPr lang="en-US" sz="1200" b="1" dirty="0">
+                <a:solidFill>
+                  <a:srgbClr val="1A2744"/>
+                </a:solidFill>
+                <a:latin typeface="Arial" pitchFamily="34" charset="0"/>
+                <a:ea typeface="Arial" pitchFamily="34" charset="-122"/>
+                <a:cs typeface="Arial" pitchFamily="34" charset="-120"/>
+              </a:rPr>
+              <a:t>(3) Wi-Fi品質の即時改善</a:t>
+            </a:r>
+            <a:endParaRPr lang="en-US" sz="1200" dirty="0"/>
+          </a:p>
+        </p:txBody>
+      </p:sp>
+      <p:sp>
+        <p:nvSpPr>
+          <p:cNvPr id="17" name="Text 15"/>
+          <p:cNvSpPr/>
+          <p:nvPr/>
+        </p:nvSpPr>
+        <p:spPr>
+          <a:xfrm>
+            <a:off x="594360" y="3383280"/>
+            <a:ext cx="3657600" cy="1188720"/>
+          </a:xfrm>
+          <a:prstGeom prst="rect">
+            <a:avLst/>
+          </a:prstGeom>
+          <a:noFill/>
+          <a:ln/>
+        </p:spPr>
+        <p:txBody>
+          <a:bodyPr wrap="square" lIns="0" tIns="0" rIns="0" bIns="0" rtlCol="0" anchor="ctr"/>
+          <a:lstStyle/>
+          <a:p>
+            <a:pPr marL="342900" indent="-342900">
+              <a:spcAft>
+                <a:spcPts val="300"/>
+              </a:spcAft>
+              <a:buSzPct val="100000"/>
+              <a:buChar char="•"/>
+            </a:pPr>
+            <a:r>
+              <a:rPr lang="en-US" sz="900" dirty="0">
+                <a:solidFill>
+                  <a:srgbClr val="334155"/>
+                </a:solidFill>
+                <a:latin typeface="Arial" pitchFamily="34" charset="0"/>
+                <a:ea typeface="Arial" pitchFamily="34" charset="-122"/>
+                <a:cs typeface="Arial" pitchFamily="34" charset="-120"/>
+              </a:rPr>
+              <a:t>Wi-Fi接続手順の案内改善（館内掲示・サイト明記）</a:t>
+            </a:r>
+            <a:endParaRPr lang="en-US" sz="900" dirty="0"/>
+          </a:p>
+          <a:p>
+            <a:pPr marL="342900" indent="-342900">
+              <a:spcAft>
+                <a:spcPts val="300"/>
+              </a:spcAft>
+              <a:buSzPct val="100000"/>
+              <a:buChar char="•"/>
+            </a:pPr>
+            <a:r>
+              <a:rPr lang="en-US" sz="900" dirty="0">
+                <a:solidFill>
+                  <a:srgbClr val="334155"/>
+                </a:solidFill>
+                <a:latin typeface="Arial" pitchFamily="34" charset="0"/>
+                <a:ea typeface="Arial" pitchFamily="34" charset="-122"/>
+                <a:cs typeface="Arial" pitchFamily="34" charset="-120"/>
+              </a:rPr>
+              <a:t>接続不具合時の対応フロー整備</a:t>
+            </a:r>
+            <a:endParaRPr lang="en-US" sz="900" dirty="0"/>
+          </a:p>
+          <a:p>
+            <a:pPr marL="342900" indent="-342900">
+              <a:spcAft>
+                <a:spcPts val="300"/>
+              </a:spcAft>
+              <a:buSzPct val="100000"/>
+              <a:buChar char="•"/>
+            </a:pPr>
+            <a:r>
+              <a:rPr lang="en-US" sz="900" dirty="0">
+                <a:solidFill>
+                  <a:srgbClr val="334155"/>
+                </a:solidFill>
+                <a:latin typeface="Arial" pitchFamily="34" charset="0"/>
+                <a:ea typeface="Arial" pitchFamily="34" charset="-122"/>
+                <a:cs typeface="Arial" pitchFamily="34" charset="-120"/>
+              </a:rPr>
+              <a:t>フロントスタッフへのWi-Fi対応スクリプト共有</a:t>
+            </a:r>
+            <a:endParaRPr lang="en-US" sz="900" dirty="0"/>
+          </a:p>
+          <a:p>
+            <a:pPr marL="342900" indent="-342900">
+              <a:spcAft>
+                <a:spcPts val="300"/>
+              </a:spcAft>
+              <a:buSzPct val="100000"/>
+              <a:buChar char="•"/>
+            </a:pPr>
+            <a:r>
+              <a:rPr lang="en-US" sz="900" dirty="0">
+                <a:solidFill>
+                  <a:srgbClr val="334155"/>
+                </a:solidFill>
+                <a:latin typeface="Arial" pitchFamily="34" charset="0"/>
+                <a:ea typeface="Arial" pitchFamily="34" charset="-122"/>
+                <a:cs typeface="Arial" pitchFamily="34" charset="-120"/>
+              </a:rPr>
+              <a:t>速度測定と問題箇所の特定</a:t>
+            </a:r>
+            <a:endParaRPr lang="en-US" sz="900" dirty="0"/>
+          </a:p>
+        </p:txBody>
+      </p:sp>
+      <p:sp>
+        <p:nvSpPr>
+          <p:cNvPr id="18" name="Shape 16"/>
+          <p:cNvSpPr/>
+          <p:nvPr/>
+        </p:nvSpPr>
+        <p:spPr>
+          <a:xfrm>
+            <a:off x="4663440" y="3017520"/>
+            <a:ext cx="3977640" cy="1600200"/>
+          </a:xfrm>
+          <a:prstGeom prst="rect">
+            <a:avLst/>
+          </a:prstGeom>
+          <a:solidFill>
+            <a:srgbClr val="FFFFFF"/>
+          </a:solidFill>
+          <a:ln/>
+          <a:effectLst>
+            <a:outerShdw sx="100000" sy="100000" kx="0" ky="0" algn="bl" rotWithShape="0" blurRad="50800" dist="25400" dir="8100000">
+              <a:srgbClr val="000000">
+                <a:alpha val="10000"/>
+              </a:srgbClr>
+            </a:outerShdw>
+          </a:effectLst>
+        </p:spPr>
+      </p:sp>
+      <p:sp>
+        <p:nvSpPr>
+          <p:cNvPr id="19" name="Shape 17"/>
+          <p:cNvSpPr/>
+          <p:nvPr/>
+        </p:nvSpPr>
+        <p:spPr>
+          <a:xfrm>
+            <a:off x="4663440" y="3017520"/>
+            <a:ext cx="54864" cy="1600200"/>
+          </a:xfrm>
+          <a:prstGeom prst="rect">
+            <a:avLst/>
+          </a:prstGeom>
+          <a:solidFill>
+            <a:srgbClr val="3B7DD8"/>
+          </a:solidFill>
+          <a:ln/>
+        </p:spPr>
+      </p:sp>
+      <p:sp>
+        <p:nvSpPr>
+          <p:cNvPr id="20" name="Text 18"/>
+          <p:cNvSpPr/>
+          <p:nvPr/>
+        </p:nvSpPr>
+        <p:spPr>
+          <a:xfrm>
+            <a:off x="4800600" y="3063240"/>
+            <a:ext cx="3657600" cy="320040"/>
+          </a:xfrm>
+          <a:prstGeom prst="rect">
+            <a:avLst/>
+          </a:prstGeom>
+          <a:noFill/>
+          <a:ln/>
+        </p:spPr>
+        <p:txBody>
+          <a:bodyPr wrap="square" lIns="0" tIns="0" rIns="0" bIns="0" rtlCol="0" anchor="ctr"/>
+          <a:lstStyle/>
+          <a:p>
+            <a:pPr indent="0" marL="0">
+              <a:buNone/>
+            </a:pPr>
+            <a:r>
+              <a:rPr lang="en-US" sz="1200" b="1" dirty="0">
+                <a:solidFill>
+                  <a:srgbClr val="1A2744"/>
+                </a:solidFill>
+                <a:latin typeface="Arial" pitchFamily="34" charset="0"/>
+                <a:ea typeface="Arial" pitchFamily="34" charset="-122"/>
+                <a:cs typeface="Arial" pitchFamily="34" charset="-120"/>
+              </a:rPr>
+              <a:t>(4) 朝食品質の即時改善</a:t>
+            </a:r>
+            <a:endParaRPr lang="en-US" sz="1200" dirty="0"/>
+          </a:p>
+        </p:txBody>
+      </p:sp>
+      <p:sp>
+        <p:nvSpPr>
+          <p:cNvPr id="21" name="Text 19"/>
+          <p:cNvSpPr/>
+          <p:nvPr/>
+        </p:nvSpPr>
+        <p:spPr>
+          <a:xfrm>
+            <a:off x="4800600" y="3383280"/>
             <a:ext cx="3657600" cy="1188720"/>
           </a:xfrm>
           <a:prstGeom prst="rect">
@@ -11920,178 +12578,7 @@
       </p:sp>
       <p:sp>
         <p:nvSpPr>
-          <p:cNvPr id="14" name="Shape 12"/>
-          <p:cNvSpPr/>
-          <p:nvPr/>
-        </p:nvSpPr>
-        <p:spPr>
-          <a:xfrm>
-            <a:off x="457200" y="3017520"/>
-            <a:ext cx="3977640" cy="1600200"/>
-          </a:xfrm>
-          <a:prstGeom prst="rect">
-            <a:avLst/>
-          </a:prstGeom>
-          <a:solidFill>
-            <a:srgbClr val="FFFFFF"/>
-          </a:solidFill>
-          <a:ln/>
-          <a:effectLst>
-            <a:outerShdw sx="100000" sy="100000" kx="0" ky="0" algn="bl" rotWithShape="0" blurRad="50800" dist="25400" dir="8100000">
-              <a:srgbClr val="000000">
-                <a:alpha val="10000"/>
-              </a:srgbClr>
-            </a:outerShdw>
-          </a:effectLst>
-        </p:spPr>
-      </p:sp>
-      <p:sp>
-        <p:nvSpPr>
-          <p:cNvPr id="15" name="Shape 13"/>
-          <p:cNvSpPr/>
-          <p:nvPr/>
-        </p:nvSpPr>
-        <p:spPr>
-          <a:xfrm>
-            <a:off x="457200" y="3017520"/>
-            <a:ext cx="54864" cy="1600200"/>
-          </a:xfrm>
-          <a:prstGeom prst="rect">
-            <a:avLst/>
-          </a:prstGeom>
-          <a:solidFill>
-            <a:srgbClr val="3B7DD8"/>
-          </a:solidFill>
-          <a:ln/>
-        </p:spPr>
-      </p:sp>
-      <p:sp>
-        <p:nvSpPr>
-          <p:cNvPr id="16" name="Text 14"/>
-          <p:cNvSpPr/>
-          <p:nvPr/>
-        </p:nvSpPr>
-        <p:spPr>
-          <a:xfrm>
-            <a:off x="594360" y="3063240"/>
-            <a:ext cx="3657600" cy="320040"/>
-          </a:xfrm>
-          <a:prstGeom prst="rect">
-            <a:avLst/>
-          </a:prstGeom>
-          <a:noFill/>
-          <a:ln/>
-        </p:spPr>
-        <p:txBody>
-          <a:bodyPr wrap="square" lIns="0" tIns="0" rIns="0" bIns="0" rtlCol="0" anchor="ctr"/>
-          <a:lstStyle/>
-          <a:p>
-            <a:pPr indent="0" marL="0">
-              <a:buNone/>
-            </a:pPr>
-            <a:r>
-              <a:rPr lang="en-US" sz="1200" b="1" dirty="0">
-                <a:solidFill>
-                  <a:srgbClr val="1A2744"/>
-                </a:solidFill>
-                <a:latin typeface="Arial" pitchFamily="34" charset="0"/>
-                <a:ea typeface="Arial" pitchFamily="34" charset="-122"/>
-                <a:cs typeface="Arial" pitchFamily="34" charset="-120"/>
-              </a:rPr>
-              <a:t>(3) 口コミ返信率100%の実現</a:t>
-            </a:r>
-            <a:endParaRPr lang="en-US" sz="1200" dirty="0"/>
-          </a:p>
-        </p:txBody>
-      </p:sp>
-      <p:sp>
-        <p:nvSpPr>
-          <p:cNvPr id="17" name="Text 15"/>
-          <p:cNvSpPr/>
-          <p:nvPr/>
-        </p:nvSpPr>
-        <p:spPr>
-          <a:xfrm>
-            <a:off x="594360" y="3383280"/>
-            <a:ext cx="3657600" cy="1188720"/>
-          </a:xfrm>
-          <a:prstGeom prst="rect">
-            <a:avLst/>
-          </a:prstGeom>
-          <a:noFill/>
-          <a:ln/>
-        </p:spPr>
-        <p:txBody>
-          <a:bodyPr wrap="square" lIns="0" tIns="0" rIns="0" bIns="0" rtlCol="0" anchor="ctr"/>
-          <a:lstStyle/>
-          <a:p>
-            <a:pPr marL="342900" indent="-342900">
-              <a:spcAft>
-                <a:spcPts val="300"/>
-              </a:spcAft>
-              <a:buSzPct val="100000"/>
-              <a:buChar char="•"/>
-            </a:pPr>
-            <a:r>
-              <a:rPr lang="en-US" sz="900" dirty="0">
-                <a:solidFill>
-                  <a:srgbClr val="334155"/>
-                </a:solidFill>
-                <a:latin typeface="Arial" pitchFamily="34" charset="0"/>
-                <a:ea typeface="Arial" pitchFamily="34" charset="-122"/>
-                <a:cs typeface="Arial" pitchFamily="34" charset="-120"/>
-              </a:rPr>
-              <a:t>全OTAサイトの口コミへの返信ルール策定（48時間以内）</a:t>
-            </a:r>
-            <a:endParaRPr lang="en-US" sz="900" dirty="0"/>
-          </a:p>
-          <a:p>
-            <a:pPr marL="342900" indent="-342900">
-              <a:spcAft>
-                <a:spcPts val="300"/>
-              </a:spcAft>
-              <a:buSzPct val="100000"/>
-              <a:buChar char="•"/>
-            </a:pPr>
-            <a:r>
-              <a:rPr lang="en-US" sz="900" dirty="0">
-                <a:solidFill>
-                  <a:srgbClr val="334155"/>
-                </a:solidFill>
-                <a:latin typeface="Arial" pitchFamily="34" charset="0"/>
-                <a:ea typeface="Arial" pitchFamily="34" charset="-122"/>
-                <a:cs typeface="Arial" pitchFamily="34" charset="-120"/>
-              </a:rPr>
-              <a:t>ネガティブ口コミへの丁寧な対応テンプレート作成</a:t>
-            </a:r>
-            <a:endParaRPr lang="en-US" sz="900" dirty="0"/>
-          </a:p>
-          <a:p>
-            <a:pPr marL="342900" indent="-342900">
-              <a:spcAft>
-                <a:spcPts val="300"/>
-              </a:spcAft>
-              <a:buSzPct val="100000"/>
-              <a:buChar char="•"/>
-            </a:pPr>
-            <a:r>
-              <a:rPr lang="en-US" sz="900" dirty="0">
-                <a:solidFill>
-                  <a:srgbClr val="334155"/>
-                </a:solidFill>
-                <a:latin typeface="Arial" pitchFamily="34" charset="0"/>
-                <a:ea typeface="Arial" pitchFamily="34" charset="-122"/>
-                <a:cs typeface="Arial" pitchFamily="34" charset="-120"/>
-              </a:rPr>
-              <a:t>フロントマネージャーによる週次口コミモニタリング</a:t>
-            </a:r>
-            <a:endParaRPr lang="en-US" sz="900" dirty="0"/>
-          </a:p>
-        </p:txBody>
-      </p:sp>
-      <p:sp>
-        <p:nvSpPr>
-          <p:cNvPr id="18" name="Shape 16"/>
+          <p:cNvPr id="22" name="Shape 20"/>
           <p:cNvSpPr/>
           <p:nvPr/>
         </p:nvSpPr>
@@ -12111,7 +12598,7 @@
       </p:sp>
       <p:sp>
         <p:nvSpPr>
-          <p:cNvPr id="19" name="Text 17"/>
+          <p:cNvPr id="23" name="Text 21"/>
           <p:cNvSpPr/>
           <p:nvPr/>
         </p:nvSpPr>
@@ -12150,7 +12637,7 @@
       </p:sp>
       <p:sp>
         <p:nvSpPr>
-          <p:cNvPr id="20" name="Text 18"/>
+          <p:cNvPr id="24" name="Text 22"/>
           <p:cNvSpPr/>
           <p:nvPr/>
         </p:nvSpPr>
@@ -12560,7 +13047,7 @@
                 <a:ea typeface="Arial" pitchFamily="34" charset="-122"/>
                 <a:cs typeface="Arial" pitchFamily="34" charset="-120"/>
               </a:rPr>
-              <a:t>朝食体験の抜本的改善</a:t>
+              <a:t>部屋改装計画の検討</a:t>
             </a:r>
             <a:endParaRPr lang="en-US" sz="1000" dirty="0"/>
           </a:p>
@@ -12603,7 +13090,7 @@
                 <a:ea typeface="Arial" pitchFamily="34" charset="-122"/>
                 <a:cs typeface="Arial" pitchFamily="34" charset="-120"/>
               </a:rPr>
-              <a:t>メニュー拡充と季節限定品の導入</a:t>
+              <a:t>上位グレード部屋への誘導施策導入</a:t>
             </a:r>
             <a:endParaRPr lang="en-US" sz="900" dirty="0"/>
           </a:p>
@@ -12624,7 +13111,7 @@
                 <a:ea typeface="Arial" pitchFamily="34" charset="-122"/>
                 <a:cs typeface="Arial" pitchFamily="34" charset="-120"/>
               </a:rPr>
-              <a:t>朝食会場レイアウト改善</a:t>
+              <a:t>スペース効率化家具への入替計画立案</a:t>
             </a:r>
             <a:endParaRPr lang="en-US" sz="900" dirty="0"/>
           </a:p>
@@ -12645,7 +13132,7 @@
                 <a:ea typeface="Arial" pitchFamily="34" charset="-122"/>
                 <a:cs typeface="Arial" pitchFamily="34" charset="-120"/>
               </a:rPr>
-              <a:t>地産地消食材の導入による差別化</a:t>
+              <a:t>客室タイプ構成の見直し</a:t>
             </a:r>
             <a:endParaRPr lang="en-US" sz="900" dirty="0"/>
           </a:p>
@@ -12684,7 +13171,7 @@
                 <a:ea typeface="Arial" pitchFamily="34" charset="-122"/>
                 <a:cs typeface="Arial" pitchFamily="34" charset="-120"/>
               </a:rPr>
-              <a:t>OTA評価スコア向上施策</a:t>
+              <a:t>通信インフラ強化</a:t>
             </a:r>
             <a:endParaRPr lang="en-US" sz="1000" dirty="0"/>
           </a:p>
@@ -12727,7 +13214,7 @@
                 <a:ea typeface="Arial" pitchFamily="34" charset="-122"/>
                 <a:cs typeface="Arial" pitchFamily="34" charset="-120"/>
               </a:rPr>
-              <a:t>高評価レビュー投稿の依頼タイミング最適化（チェックアウト時）</a:t>
+              <a:t>Wi-Fiルーター増設・アップグレード計画</a:t>
             </a:r>
             <a:endParaRPr lang="en-US" sz="900" dirty="0"/>
           </a:p>
@@ -12748,7 +13235,7 @@
                 <a:ea typeface="Arial" pitchFamily="34" charset="-122"/>
                 <a:cs typeface="Arial" pitchFamily="34" charset="-120"/>
               </a:rPr>
-              <a:t>満足度の高い宿泊者へのフォローアップメール送信</a:t>
+              <a:t>帯域幅の拡大検討</a:t>
             </a:r>
             <a:endParaRPr lang="en-US" sz="900" dirty="0"/>
           </a:p>
@@ -12769,7 +13256,7 @@
                 <a:ea typeface="Arial" pitchFamily="34" charset="-122"/>
                 <a:cs typeface="Arial" pitchFamily="34" charset="-120"/>
               </a:rPr>
-              <a:t>じゃらん・楽天の評価向上に向けた特典プログラム検討</a:t>
+              <a:t>5G対応設備への移行ロードマップ策定</a:t>
             </a:r>
             <a:endParaRPr lang="en-US" sz="900" dirty="0"/>
           </a:p>
@@ -13849,7 +14336,7 @@
                           <a:ea typeface="Arial" pitchFamily="34" charset="-122"/>
                           <a:cs typeface="Arial" pitchFamily="34" charset="-120"/>
                         </a:rPr>
-                        <a:t>8.82点</a:t>
+                        <a:t>8.83点</a:t>
                       </a:r>
                       <a:endParaRPr lang="en-US" sz="1000" dirty="0">
                         <a:latin typeface="Arial" charset="0"/>
@@ -14123,7 +14610,7 @@
                           <a:ea typeface="Arial" pitchFamily="34" charset="-122"/>
                           <a:cs typeface="Arial" pitchFamily="34" charset="-120"/>
                         </a:rPr>
-                        <a:t>86.2%</a:t>
+                        <a:t>84.1%</a:t>
                       </a:r>
                       <a:endParaRPr lang="en-US" sz="1000" dirty="0">
                         <a:latin typeface="Arial" charset="0"/>
@@ -14191,7 +14678,7 @@
                           <a:ea typeface="Arial" pitchFamily="34" charset="-122"/>
                           <a:cs typeface="Arial" pitchFamily="34" charset="-120"/>
                         </a:rPr>
-                        <a:t>91%以上</a:t>
+                        <a:t>89%以上</a:t>
                       </a:r>
                       <a:endParaRPr lang="en-US" sz="1000" dirty="0">
                         <a:latin typeface="Arial" charset="0"/>
@@ -14397,7 +14884,7 @@
                           <a:ea typeface="Arial" pitchFamily="34" charset="-122"/>
                           <a:cs typeface="Arial" pitchFamily="34" charset="-120"/>
                         </a:rPr>
-                        <a:t>1.5%</a:t>
+                        <a:t>0.8%</a:t>
                       </a:r>
                       <a:endParaRPr lang="en-US" sz="1000" dirty="0">
                         <a:latin typeface="Arial" charset="0"/>
@@ -14465,7 +14952,7 @@
                           <a:ea typeface="Arial" pitchFamily="34" charset="-122"/>
                           <a:cs typeface="Arial" pitchFamily="34" charset="-120"/>
                         </a:rPr>
-                        <a:t>0.5%以下</a:t>
+                        <a:t>0%以下</a:t>
                       </a:r>
                       <a:endParaRPr lang="en-US" sz="1000" dirty="0">
                         <a:latin typeface="Arial" charset="0"/>
@@ -14877,7 +15364,7 @@
                           <a:ea typeface="Arial" pitchFamily="34" charset="-122"/>
                           <a:cs typeface="Arial" pitchFamily="34" charset="-120"/>
                         </a:rPr>
-                        <a:t>じゃらん評価</a:t>
+                        <a:t>Google評価</a:t>
                       </a:r>
                       <a:endParaRPr lang="en-US" sz="1000" dirty="0">
                         <a:latin typeface="Arial" charset="0"/>
@@ -14945,7 +15432,7 @@
                           <a:ea typeface="Arial" pitchFamily="34" charset="-122"/>
                           <a:cs typeface="Arial" pitchFamily="34" charset="-120"/>
                         </a:rPr>
-                        <a:t>4.75/5点</a:t>
+                        <a:t>4.81/5点</a:t>
                       </a:r>
                       <a:endParaRPr lang="en-US" sz="1000" dirty="0">
                         <a:latin typeface="Arial" charset="0"/>
@@ -15151,7 +15638,7 @@
                           <a:ea typeface="Arial" pitchFamily="34" charset="-122"/>
                           <a:cs typeface="Arial" pitchFamily="34" charset="-120"/>
                         </a:rPr>
-                        <a:t>楽天トラベル評価</a:t>
+                        <a:t>じゃらん評価</a:t>
                       </a:r>
                       <a:endParaRPr lang="en-US" sz="1000" dirty="0">
                         <a:latin typeface="Arial" charset="0"/>
@@ -15219,7 +15706,7 @@
                           <a:ea typeface="Arial" pitchFamily="34" charset="-122"/>
                           <a:cs typeface="Arial" pitchFamily="34" charset="-120"/>
                         </a:rPr>
-                        <a:t>4.73/5点</a:t>
+                        <a:t>4.64/5点</a:t>
                       </a:r>
                       <a:endParaRPr lang="en-US" sz="1000" dirty="0">
                         <a:latin typeface="Arial" charset="0"/>
@@ -15287,7 +15774,7 @@
                           <a:ea typeface="Arial" pitchFamily="34" charset="-122"/>
                           <a:cs typeface="Arial" pitchFamily="34" charset="-120"/>
                         </a:rPr>
-                        <a:t>4.9/5点以上</a:t>
+                        <a:t>4.8/5点以上</a:t>
                       </a:r>
                       <a:endParaRPr lang="en-US" sz="1000" dirty="0">
                         <a:latin typeface="Arial" charset="0"/>
